--- a/Document/页面流程v5.pptx
+++ b/Document/页面流程v5.pptx
@@ -195,7 +195,7 @@
           <a:p>
             <a:fld id="{45E0632B-FDD4-48A0-AF5C-5C4E0E093B3E}" type="datetimeFigureOut">
               <a:rPr lang="zh-CN" altLang="en-US" smtClean="0"/>
-              <a:t>2013-8-11</a:t>
+              <a:t>2013/8/21</a:t>
             </a:fld>
             <a:endParaRPr lang="zh-CN" altLang="en-US"/>
           </a:p>
@@ -363,6 +363,11 @@
         </p:txBody>
       </p:sp>
     </p:spTree>
+    <p:extLst>
+      <p:ext uri="{BB962C8B-B14F-4D97-AF65-F5344CB8AC3E}">
+        <p14:creationId xmlns:p14="http://schemas.microsoft.com/office/powerpoint/2010/main" val="197412385"/>
+      </p:ext>
+    </p:extLst>
   </p:cSld>
   <p:clrMap bg1="lt1" tx1="dk1" bg2="lt2" tx2="dk2" accent1="accent1" accent2="accent2" accent3="accent3" accent4="accent4" accent5="accent5" accent6="accent6" hlink="hlink" folHlink="folHlink"/>
   <p:notesStyle>
@@ -723,7 +728,7 @@
             <a:fld id="{530820CF-B880-4189-942D-D702A7CBA730}" type="datetimeFigureOut">
               <a:rPr lang="zh-CN" altLang="en-US" smtClean="0"/>
               <a:pPr/>
-              <a:t>2013-8-11</a:t>
+              <a:t>2013/8/21</a:t>
             </a:fld>
             <a:endParaRPr lang="zh-CN" altLang="en-US"/>
           </a:p>
@@ -890,7 +895,7 @@
             <a:fld id="{530820CF-B880-4189-942D-D702A7CBA730}" type="datetimeFigureOut">
               <a:rPr lang="zh-CN" altLang="en-US" smtClean="0"/>
               <a:pPr/>
-              <a:t>2013-8-11</a:t>
+              <a:t>2013/8/21</a:t>
             </a:fld>
             <a:endParaRPr lang="zh-CN" altLang="en-US"/>
           </a:p>
@@ -1067,7 +1072,7 @@
             <a:fld id="{530820CF-B880-4189-942D-D702A7CBA730}" type="datetimeFigureOut">
               <a:rPr lang="zh-CN" altLang="en-US" smtClean="0"/>
               <a:pPr/>
-              <a:t>2013-8-11</a:t>
+              <a:t>2013/8/21</a:t>
             </a:fld>
             <a:endParaRPr lang="zh-CN" altLang="en-US"/>
           </a:p>
@@ -1234,7 +1239,7 @@
             <a:fld id="{530820CF-B880-4189-942D-D702A7CBA730}" type="datetimeFigureOut">
               <a:rPr lang="zh-CN" altLang="en-US" smtClean="0"/>
               <a:pPr/>
-              <a:t>2013-8-11</a:t>
+              <a:t>2013/8/21</a:t>
             </a:fld>
             <a:endParaRPr lang="zh-CN" altLang="en-US"/>
           </a:p>
@@ -1288,6 +1293,13 @@
   <p:clrMapOvr>
     <a:masterClrMapping/>
   </p:clrMapOvr>
+  <p:timing>
+    <p:tnLst>
+      <p:par>
+        <p:cTn id="1" dur="indefinite" restart="never" nodeType="tmRoot"/>
+      </p:par>
+    </p:tnLst>
+  </p:timing>
 </p:sldLayout>
 </file>
 
@@ -1477,7 +1489,7 @@
             <a:fld id="{530820CF-B880-4189-942D-D702A7CBA730}" type="datetimeFigureOut">
               <a:rPr lang="zh-CN" altLang="en-US" smtClean="0"/>
               <a:pPr/>
-              <a:t>2013-8-11</a:t>
+              <a:t>2013/8/21</a:t>
             </a:fld>
             <a:endParaRPr lang="zh-CN" altLang="en-US"/>
           </a:p>
@@ -1762,7 +1774,7 @@
             <a:fld id="{530820CF-B880-4189-942D-D702A7CBA730}" type="datetimeFigureOut">
               <a:rPr lang="zh-CN" altLang="en-US" smtClean="0"/>
               <a:pPr/>
-              <a:t>2013-8-11</a:t>
+              <a:t>2013/8/21</a:t>
             </a:fld>
             <a:endParaRPr lang="zh-CN" altLang="en-US"/>
           </a:p>
@@ -2181,7 +2193,7 @@
             <a:fld id="{530820CF-B880-4189-942D-D702A7CBA730}" type="datetimeFigureOut">
               <a:rPr lang="zh-CN" altLang="en-US" smtClean="0"/>
               <a:pPr/>
-              <a:t>2013-8-11</a:t>
+              <a:t>2013/8/21</a:t>
             </a:fld>
             <a:endParaRPr lang="zh-CN" altLang="en-US"/>
           </a:p>
@@ -2296,7 +2308,7 @@
             <a:fld id="{530820CF-B880-4189-942D-D702A7CBA730}" type="datetimeFigureOut">
               <a:rPr lang="zh-CN" altLang="en-US" smtClean="0"/>
               <a:pPr/>
-              <a:t>2013-8-11</a:t>
+              <a:t>2013/8/21</a:t>
             </a:fld>
             <a:endParaRPr lang="zh-CN" altLang="en-US"/>
           </a:p>
@@ -2388,7 +2400,7 @@
             <a:fld id="{530820CF-B880-4189-942D-D702A7CBA730}" type="datetimeFigureOut">
               <a:rPr lang="zh-CN" altLang="en-US" smtClean="0"/>
               <a:pPr/>
-              <a:t>2013-8-11</a:t>
+              <a:t>2013/8/21</a:t>
             </a:fld>
             <a:endParaRPr lang="zh-CN" altLang="en-US"/>
           </a:p>
@@ -2662,7 +2674,7 @@
             <a:fld id="{530820CF-B880-4189-942D-D702A7CBA730}" type="datetimeFigureOut">
               <a:rPr lang="zh-CN" altLang="en-US" smtClean="0"/>
               <a:pPr/>
-              <a:t>2013-8-11</a:t>
+              <a:t>2013/8/21</a:t>
             </a:fld>
             <a:endParaRPr lang="zh-CN" altLang="en-US"/>
           </a:p>
@@ -2912,7 +2924,7 @@
             <a:fld id="{530820CF-B880-4189-942D-D702A7CBA730}" type="datetimeFigureOut">
               <a:rPr lang="zh-CN" altLang="en-US" smtClean="0"/>
               <a:pPr/>
-              <a:t>2013-8-11</a:t>
+              <a:t>2013/8/21</a:t>
             </a:fld>
             <a:endParaRPr lang="zh-CN" altLang="en-US"/>
           </a:p>
@@ -3122,7 +3134,7 @@
             <a:fld id="{530820CF-B880-4189-942D-D702A7CBA730}" type="datetimeFigureOut">
               <a:rPr lang="zh-CN" altLang="en-US" smtClean="0"/>
               <a:pPr/>
-              <a:t>2013-8-11</a:t>
+              <a:t>2013/8/21</a:t>
             </a:fld>
             <a:endParaRPr lang="zh-CN" altLang="en-US"/>
           </a:p>
@@ -3654,11 +3666,7 @@
             </a:r>
             <a:r>
               <a:rPr lang="zh-CN" altLang="en-US" sz="1200" dirty="0" smtClean="0"/>
-              <a:t>注册及配对设置（用户</a:t>
-            </a:r>
-            <a:r>
-              <a:rPr lang="zh-CN" altLang="en-US" sz="1200" dirty="0" smtClean="0"/>
-              <a:t>未绑定</a:t>
+              <a:t>注册及配对设置（用户未绑定</a:t>
             </a:r>
             <a:r>
               <a:rPr lang="en-US" altLang="zh-CN" sz="1200" dirty="0" err="1" smtClean="0"/>
@@ -3903,11 +3911,7 @@
             <a:p>
               <a:r>
                 <a:rPr lang="en-US" altLang="zh-CN" sz="1400" dirty="0" smtClean="0"/>
-                <a:t>【5】 </a:t>
-              </a:r>
-              <a:r>
-                <a:rPr lang="en-US" altLang="zh-CN" sz="1400" dirty="0" smtClean="0"/>
-                <a:t>free credits have been given to you</a:t>
+                <a:t>【5】 free credits have been given to you</a:t>
               </a:r>
             </a:p>
             <a:p>
@@ -4059,31 +4063,7 @@
                   <a:srgbClr val="FF0000"/>
                 </a:solidFill>
               </a:rPr>
-              <a:t>整体色调</a:t>
-            </a:r>
-            <a:r>
-              <a:rPr lang="zh-CN" altLang="en-US" sz="1600" dirty="0" smtClean="0">
-                <a:solidFill>
-                  <a:srgbClr val="FF0000"/>
-                </a:solidFill>
-              </a:rPr>
-              <a:t>要求</a:t>
-            </a:r>
-            <a:r>
-              <a:rPr lang="zh-CN" altLang="en-US" sz="1600" dirty="0" smtClean="0">
-                <a:solidFill>
-                  <a:srgbClr val="FF0000"/>
-                </a:solidFill>
-              </a:rPr>
-              <a:t>简洁活泼</a:t>
-            </a:r>
-            <a:r>
-              <a:rPr lang="zh-CN" altLang="en-US" sz="1600" dirty="0" smtClean="0">
-                <a:solidFill>
-                  <a:srgbClr val="FF0000"/>
-                </a:solidFill>
-              </a:rPr>
-              <a:t>，参考</a:t>
+              <a:t>整体色调要求简洁活泼，参考</a:t>
             </a:r>
             <a:r>
               <a:rPr lang="en-US" altLang="zh-CN" sz="1600" dirty="0" err="1" smtClean="0">
@@ -4099,15 +4079,7 @@
                   <a:srgbClr val="FF0000"/>
                 </a:solidFill>
               </a:rPr>
-              <a:t>，</a:t>
-            </a:r>
-            <a:r>
-              <a:rPr lang="zh-CN" altLang="en-US" sz="1600" dirty="0" smtClean="0">
-                <a:solidFill>
-                  <a:srgbClr val="FF0000"/>
-                </a:solidFill>
-              </a:rPr>
-              <a:t>主背景色调选择白色、浅灰、或黑色。其他颜色根据背景色搭配。</a:t>
+              <a:t>，主背景色调选择白色、浅灰、或黑色。其他颜色根据背景色搭配。</a:t>
             </a:r>
             <a:endParaRPr lang="zh-CN" altLang="en-US" sz="1600" dirty="0">
               <a:solidFill>
@@ -4210,11 +4182,7 @@
               </a:r>
               <a:r>
                 <a:rPr lang="zh-CN" altLang="en-US" sz="1400" dirty="0" smtClean="0"/>
-                <a:t>帐号</a:t>
-              </a:r>
-              <a:r>
-                <a:rPr lang="zh-CN" altLang="en-US" sz="1400" dirty="0" smtClean="0"/>
-                <a:t>登录</a:t>
+                <a:t>帐号登录</a:t>
               </a:r>
               <a:endParaRPr lang="en-US" altLang="zh-CN" sz="1400" dirty="0" smtClean="0"/>
             </a:p>
@@ -4337,11 +4305,7 @@
           <a:p>
             <a:r>
               <a:rPr lang="zh-CN" altLang="en-US" dirty="0" smtClean="0"/>
-              <a:t>过程</a:t>
-            </a:r>
-            <a:r>
-              <a:rPr lang="zh-CN" altLang="en-US" dirty="0" smtClean="0"/>
-              <a:t>演示，包括设置</a:t>
+              <a:t>过程演示，包括设置</a:t>
             </a:r>
             <a:endParaRPr lang="zh-CN" altLang="en-US" dirty="0"/>
           </a:p>
@@ -4534,11 +4498,7 @@
             </a:r>
             <a:r>
               <a:rPr lang="zh-CN" altLang="en-US" sz="1200" dirty="0" smtClean="0"/>
-              <a:t>和年龄</a:t>
-            </a:r>
-            <a:r>
-              <a:rPr lang="zh-CN" altLang="en-US" sz="1200" dirty="0" smtClean="0"/>
-              <a:t>信息）</a:t>
+              <a:t>和年龄信息）</a:t>
             </a:r>
             <a:endParaRPr lang="zh-CN" altLang="en-US" sz="1200" dirty="0"/>
           </a:p>
@@ -5008,15 +4968,7 @@
                   <a:schemeClr val="tx1"/>
                 </a:solidFill>
               </a:rPr>
-              <a:t>此处为更多</a:t>
-            </a:r>
-            <a:r>
-              <a:rPr lang="zh-CN" altLang="en-US" sz="1200" dirty="0" smtClean="0">
-                <a:solidFill>
-                  <a:schemeClr val="tx1"/>
-                </a:solidFill>
-              </a:rPr>
-              <a:t>选项</a:t>
+              <a:t>此处为更多选项</a:t>
             </a:r>
             <a:endParaRPr lang="zh-CN" altLang="en-US" sz="1200" dirty="0">
               <a:solidFill>
@@ -5094,71 +5046,15 @@
                   <a:schemeClr val="tx1"/>
                 </a:solidFill>
               </a:rPr>
-              <a:t>点，则显示滚动提示：</a:t>
-            </a:r>
-            <a:r>
-              <a:rPr lang="zh-CN" altLang="en-US" sz="1200" dirty="0" smtClean="0">
+              <a:t>点，则显示滚动提示：“</a:t>
+            </a:r>
+            <a:r>
+              <a:rPr lang="en-US" altLang="zh-CN" sz="1200" dirty="0" smtClean="0">
                 <a:solidFill>
                   <a:schemeClr val="tx1"/>
                 </a:solidFill>
               </a:rPr>
-              <a:t>“</a:t>
-            </a:r>
-            <a:r>
-              <a:rPr lang="en-US" altLang="zh-CN" sz="1200" dirty="0" smtClean="0">
-                <a:solidFill>
-                  <a:schemeClr val="tx1"/>
-                </a:solidFill>
-              </a:rPr>
-              <a:t>C</a:t>
-            </a:r>
-            <a:r>
-              <a:rPr lang="en-US" altLang="zh-CN" sz="1200" dirty="0" smtClean="0">
-                <a:solidFill>
-                  <a:schemeClr val="tx1"/>
-                </a:solidFill>
-              </a:rPr>
-              <a:t>redit </a:t>
-            </a:r>
-            <a:r>
-              <a:rPr lang="en-US" altLang="zh-CN" sz="1200" dirty="0" smtClean="0">
-                <a:solidFill>
-                  <a:schemeClr val="tx1"/>
-                </a:solidFill>
-              </a:rPr>
-              <a:t>balance </a:t>
-            </a:r>
-            <a:r>
-              <a:rPr lang="en-US" altLang="zh-CN" sz="1200" dirty="0" smtClean="0">
-                <a:solidFill>
-                  <a:schemeClr val="tx1"/>
-                </a:solidFill>
-              </a:rPr>
-              <a:t>low</a:t>
-            </a:r>
-            <a:r>
-              <a:rPr lang="en-US" altLang="zh-CN" sz="1200" dirty="0" smtClean="0">
-                <a:solidFill>
-                  <a:schemeClr val="tx1"/>
-                </a:solidFill>
-              </a:rPr>
-              <a:t>, </a:t>
-            </a:r>
-            <a:r>
-              <a:rPr lang="en-US" altLang="zh-CN" sz="1200" dirty="0" smtClean="0">
-                <a:solidFill>
-                  <a:schemeClr val="tx1"/>
-                </a:solidFill>
-              </a:rPr>
-              <a:t>buy credits </a:t>
-            </a:r>
-            <a:r>
-              <a:rPr lang="en-US" altLang="zh-CN" sz="1200" dirty="0" smtClean="0">
-                <a:solidFill>
-                  <a:schemeClr val="tx1"/>
-                </a:solidFill>
-              </a:rPr>
-              <a:t>now!” </a:t>
+              <a:t>Credit balance low, buy credits now!” </a:t>
             </a:r>
             <a:r>
               <a:rPr lang="zh-CN" altLang="en-US" sz="1200" dirty="0" smtClean="0">
@@ -5440,7 +5336,6 @@
               <a:rPr lang="en-US" altLang="zh-CN" sz="900" dirty="0" smtClean="0"/>
               <a:t>Are you with friends?</a:t>
             </a:r>
-            <a:endParaRPr lang="en-US" altLang="zh-CN" sz="900" dirty="0" smtClean="0"/>
           </a:p>
           <a:p>
             <a:r>
@@ -5466,7 +5361,6 @@
               <a:rPr lang="en-US" altLang="zh-CN" sz="900" dirty="0" smtClean="0"/>
               <a:t>Your destination</a:t>
             </a:r>
-            <a:endParaRPr lang="en-US" altLang="zh-CN" sz="900" dirty="0" smtClean="0"/>
           </a:p>
           <a:p>
             <a:r>
@@ -5479,19 +5373,7 @@
             </a:r>
             <a:r>
               <a:rPr lang="en-US" altLang="zh-CN" sz="900" dirty="0" smtClean="0"/>
-              <a:t>of </a:t>
-            </a:r>
-            <a:r>
-              <a:rPr lang="en-US" altLang="zh-CN" sz="900" dirty="0" smtClean="0"/>
-              <a:t>your</a:t>
-            </a:r>
-            <a:r>
-              <a:rPr lang="en-US" altLang="zh-CN" sz="900" dirty="0" smtClean="0"/>
-              <a:t> </a:t>
-            </a:r>
-            <a:r>
-              <a:rPr lang="en-US" altLang="zh-CN" sz="900" dirty="0" smtClean="0"/>
-              <a:t>top</a:t>
+              <a:t>of your top</a:t>
             </a:r>
           </a:p>
           <a:p>
@@ -5558,7 +5440,7 @@
         </p:nvSpPr>
         <p:spPr>
           <a:xfrm>
-            <a:off x="4786314" y="3500438"/>
+            <a:off x="4922049" y="3789580"/>
             <a:ext cx="500066" cy="142876"/>
           </a:xfrm>
           <a:prstGeom prst="rect">
@@ -6639,23 +6521,7 @@
           <a:p>
             <a:r>
               <a:rPr lang="zh-CN" altLang="en-US" sz="1200" dirty="0" smtClean="0"/>
-              <a:t>即时提示输入</a:t>
-            </a:r>
-            <a:r>
-              <a:rPr lang="zh-CN" altLang="en-US" sz="1200" dirty="0" smtClean="0"/>
-              <a:t>匹配</a:t>
-            </a:r>
-            <a:r>
-              <a:rPr lang="zh-CN" altLang="en-US" sz="1200" dirty="0" smtClean="0"/>
-              <a:t>地点</a:t>
-            </a:r>
-            <a:r>
-              <a:rPr lang="zh-CN" altLang="en-US" sz="1200" dirty="0" smtClean="0"/>
-              <a:t>列表</a:t>
-            </a:r>
-            <a:r>
-              <a:rPr lang="zh-CN" altLang="en-US" sz="1200" dirty="0" smtClean="0"/>
-              <a:t>，用户点击即为选择退回上一界面</a:t>
+              <a:t>即时提示输入匹配地点列表，用户点击即为选择退回上一界面</a:t>
             </a:r>
             <a:endParaRPr lang="zh-CN" altLang="en-US" sz="1200" dirty="0"/>
           </a:p>
@@ -7042,15 +6908,7 @@
           <a:p>
             <a:r>
               <a:rPr lang="zh-CN" altLang="en-US" sz="1200" dirty="0" smtClean="0"/>
-              <a:t>即时提示输入匹配出租车站列表，用户</a:t>
-            </a:r>
-            <a:r>
-              <a:rPr lang="zh-CN" altLang="en-US" sz="1200" dirty="0" smtClean="0"/>
-              <a:t>点击某一提示即</a:t>
-            </a:r>
-            <a:r>
-              <a:rPr lang="zh-CN" altLang="en-US" sz="1200" dirty="0" smtClean="0"/>
-              <a:t>为选择退回上一界面</a:t>
+              <a:t>即时提示输入匹配出租车站列表，用户点击某一提示即为选择退回上一界面</a:t>
             </a:r>
             <a:endParaRPr lang="zh-CN" altLang="en-US" sz="1200" dirty="0"/>
           </a:p>
@@ -7229,31 +7087,7 @@
           <a:p>
             <a:r>
               <a:rPr lang="en-US" altLang="zh-CN" sz="1100" dirty="0" smtClean="0"/>
-              <a:t>Thank you! We have recorded the </a:t>
-            </a:r>
-            <a:r>
-              <a:rPr lang="en-US" altLang="zh-CN" sz="1100" dirty="0" smtClean="0"/>
-              <a:t>coordinates of the </a:t>
-            </a:r>
-            <a:r>
-              <a:rPr lang="en-US" altLang="zh-CN" sz="1100" dirty="0" smtClean="0"/>
-              <a:t>taxi </a:t>
-            </a:r>
-            <a:r>
-              <a:rPr lang="en-US" altLang="zh-CN" sz="1100" dirty="0" smtClean="0"/>
-              <a:t>stand </a:t>
-            </a:r>
-            <a:r>
-              <a:rPr lang="en-US" altLang="zh-CN" sz="1100" dirty="0" smtClean="0"/>
-              <a:t>you have proposed </a:t>
-            </a:r>
-            <a:r>
-              <a:rPr lang="en-US" altLang="zh-CN" sz="1100" dirty="0" smtClean="0"/>
-              <a:t>and </a:t>
-            </a:r>
-            <a:r>
-              <a:rPr lang="en-US" altLang="zh-CN" sz="1100" dirty="0" smtClean="0"/>
-              <a:t>will add in after verifying.</a:t>
+              <a:t>Thank you! We have recorded the coordinates of the taxi stand you have proposed and will add in after verifying.</a:t>
             </a:r>
             <a:endParaRPr lang="zh-CN" altLang="en-US" sz="1100" dirty="0"/>
           </a:p>
@@ -7738,11 +7572,7 @@
             </a:r>
             <a:r>
               <a:rPr lang="zh-CN" altLang="en-US" sz="1200" dirty="0" smtClean="0"/>
-              <a:t>”按下</a:t>
-            </a:r>
-            <a:r>
-              <a:rPr lang="zh-CN" altLang="en-US" sz="1200" dirty="0" smtClean="0"/>
-              <a:t>后</a:t>
+              <a:t>”按下后</a:t>
             </a:r>
             <a:r>
               <a:rPr lang="en-US" altLang="zh-CN" sz="1200" dirty="0" smtClean="0"/>
@@ -7750,11 +7580,7 @@
             </a:r>
             <a:r>
               <a:rPr lang="zh-CN" altLang="en-US" sz="1200" dirty="0" smtClean="0"/>
-              <a:t>显示一下界面（</a:t>
-            </a:r>
-            <a:r>
-              <a:rPr lang="zh-CN" altLang="en-US" sz="1200" dirty="0" smtClean="0"/>
-              <a:t>先下车和后下车用户显示内容不同）</a:t>
+              <a:t>显示一下界面（先下车和后下车用户显示内容不同）</a:t>
             </a:r>
             <a:endParaRPr lang="zh-CN" altLang="en-US" sz="1200" dirty="0"/>
           </a:p>
@@ -7848,11 +7674,7 @@
           <a:p>
             <a:r>
               <a:rPr lang="en-US" altLang="zh-CN" sz="1000" dirty="0" smtClean="0"/>
-              <a:t>We will reach your destination first. At the time of lighting, please pay xxx half of the amount on the taxi </a:t>
-            </a:r>
-            <a:r>
-              <a:rPr lang="en-US" altLang="zh-CN" sz="1000" dirty="0" smtClean="0"/>
-              <a:t>meter.</a:t>
+              <a:t>We will reach your destination first. At the time of lighting, please pay xxx half of the amount on the taxi meter.</a:t>
             </a:r>
             <a:endParaRPr lang="zh-CN" altLang="en-US" sz="1000" dirty="0"/>
           </a:p>
@@ -7946,15 +7768,7 @@
           <a:p>
             <a:r>
               <a:rPr lang="en-US" altLang="zh-CN" sz="800" dirty="0" smtClean="0"/>
-              <a:t>We will drop off xxx first and continue driving towards your destination. Please collect half of the amount on the taxi meter from xxx when he </a:t>
-            </a:r>
-            <a:r>
-              <a:rPr lang="en-US" altLang="zh-CN" sz="800" dirty="0" smtClean="0"/>
-              <a:t>alights  </a:t>
-            </a:r>
-            <a:r>
-              <a:rPr lang="en-US" altLang="zh-CN" sz="800" dirty="0" smtClean="0"/>
-              <a:t>and </a:t>
+              <a:t>We will drop off xxx first and continue driving towards your destination. Please collect half of the amount on the taxi meter from xxx when he alights  and </a:t>
             </a:r>
             <a:r>
               <a:rPr lang="en-US" altLang="zh-CN" sz="800" dirty="0" err="1" smtClean="0"/>
@@ -7962,11 +7776,7 @@
             </a:r>
             <a:r>
               <a:rPr lang="en-US" altLang="zh-CN" sz="800" dirty="0" smtClean="0"/>
-              <a:t> he </a:t>
-            </a:r>
-            <a:r>
-              <a:rPr lang="en-US" altLang="zh-CN" sz="800" dirty="0" smtClean="0"/>
-              <a:t>driver the final fare.</a:t>
+              <a:t> he driver the final fare.</a:t>
             </a:r>
             <a:endParaRPr lang="zh-CN" altLang="en-US" sz="800" dirty="0"/>
           </a:p>
@@ -8109,15 +7919,7 @@
                   <a:schemeClr val="tx1"/>
                 </a:solidFill>
               </a:rPr>
-              <a:t>新加坡</a:t>
-            </a:r>
-            <a:r>
-              <a:rPr lang="zh-CN" altLang="en-US" sz="1200" dirty="0" smtClean="0">
-                <a:solidFill>
-                  <a:schemeClr val="tx1"/>
-                </a:solidFill>
-              </a:rPr>
-              <a:t>出租车计费标准：</a:t>
+              <a:t>新加坡出租车计费标准：</a:t>
             </a:r>
             <a:r>
               <a:rPr lang="zh-CN" altLang="en-US" sz="1200" dirty="0" smtClean="0">
@@ -8873,15 +8675,7 @@
             </a:r>
             <a:r>
               <a:rPr lang="zh-CN" altLang="en-US" sz="1200" dirty="0" smtClean="0"/>
-              <a:t>配对页面（如果用户已加入队列，则直接显示配对</a:t>
-            </a:r>
-            <a:r>
-              <a:rPr lang="zh-CN" altLang="en-US" sz="1200" dirty="0" smtClean="0"/>
-              <a:t>页面</a:t>
-            </a:r>
-            <a:r>
-              <a:rPr lang="zh-CN" altLang="en-US" sz="1200" dirty="0" smtClean="0"/>
-              <a:t>）</a:t>
+              <a:t>配对页面（如果用户已加入队列，则直接显示配对页面）</a:t>
             </a:r>
             <a:endParaRPr lang="zh-CN" altLang="en-US" sz="1200" dirty="0"/>
           </a:p>
@@ -12289,7 +12083,6 @@
               <a:rPr lang="en-US" altLang="zh-CN" sz="1000" dirty="0" smtClean="0"/>
               <a:t>Return to Main</a:t>
             </a:r>
-            <a:endParaRPr lang="en-US" altLang="zh-CN" sz="1000" dirty="0" smtClean="0"/>
           </a:p>
           <a:p>
             <a:r>
@@ -12347,15 +12140,7 @@
                   <a:srgbClr val="FF0000"/>
                 </a:solidFill>
               </a:rPr>
-              <a:t>History and </a:t>
-            </a:r>
-            <a:r>
-              <a:rPr lang="en-US" altLang="zh-CN" sz="1000" dirty="0" smtClean="0">
-                <a:solidFill>
-                  <a:srgbClr val="FF0000"/>
-                </a:solidFill>
-              </a:rPr>
-              <a:t>Rating</a:t>
+              <a:t>History and Rating</a:t>
             </a:r>
           </a:p>
           <a:p>
@@ -12367,11 +12152,6 @@
               </a:rPr>
               <a:t>Messages(2)</a:t>
             </a:r>
-            <a:endParaRPr lang="en-US" altLang="zh-CN" sz="1000" dirty="0" smtClean="0">
-              <a:solidFill>
-                <a:srgbClr val="FF0000"/>
-              </a:solidFill>
-            </a:endParaRPr>
           </a:p>
           <a:p>
             <a:r>
@@ -13057,43 +12837,7 @@
           <a:p>
             <a:r>
               <a:rPr lang="en-US" altLang="zh-CN" sz="1200" dirty="0" smtClean="0"/>
-              <a:t>Your credit balance is </a:t>
-            </a:r>
-            <a:r>
-              <a:rPr lang="en-US" altLang="zh-CN" sz="1200" dirty="0" smtClean="0"/>
-              <a:t>low</a:t>
-            </a:r>
-            <a:r>
-              <a:rPr lang="en-US" altLang="zh-CN" sz="1200" dirty="0" smtClean="0"/>
-              <a:t>. </a:t>
-            </a:r>
-            <a:r>
-              <a:rPr lang="en-US" altLang="zh-CN" sz="1200" dirty="0" smtClean="0"/>
-              <a:t>Would you like to </a:t>
-            </a:r>
-            <a:r>
-              <a:rPr lang="en-US" altLang="zh-CN" sz="1200" dirty="0" smtClean="0"/>
-              <a:t>buy</a:t>
-            </a:r>
-            <a:r>
-              <a:rPr lang="en-US" altLang="zh-CN" sz="1200" dirty="0" smtClean="0"/>
-              <a:t> </a:t>
-            </a:r>
-            <a:r>
-              <a:rPr lang="en-US" altLang="zh-CN" sz="1200" dirty="0" smtClean="0"/>
-              <a:t>more credits and </a:t>
-            </a:r>
-            <a:r>
-              <a:rPr lang="en-US" altLang="zh-CN" sz="1200" dirty="0" smtClean="0"/>
-              <a:t>continue enjoying </a:t>
-            </a:r>
-            <a:r>
-              <a:rPr lang="en-US" altLang="zh-CN" sz="1200" dirty="0" smtClean="0"/>
-              <a:t>more </a:t>
-            </a:r>
-            <a:r>
-              <a:rPr lang="en-US" altLang="zh-CN" sz="1200" dirty="0" smtClean="0"/>
-              <a:t>savings?</a:t>
+              <a:t>Your credit balance is low. Would you like to buy more credits and continue enjoying more savings?</a:t>
             </a:r>
             <a:endParaRPr lang="zh-CN" altLang="en-US" sz="1200" dirty="0"/>
           </a:p>
